--- a/atelier/atelier-x06-business-card-front.pptx
+++ b/atelier/atelier-x06-business-card-front.pptx
@@ -3140,7 +3140,7 @@
         </p:nvSpPr>
         <p:spPr>
           <a:xfrm>
-            <a:off x="666750" y="3319462"/>
+            <a:off x="666750" y="3241030"/>
             <a:ext cx="7753350" cy="9525"/>
           </a:xfrm>
           <a:prstGeom prst="rect">
@@ -3360,7 +3360,7 @@
         </p:nvSpPr>
         <p:spPr>
           <a:xfrm>
-            <a:off x="666750" y="2062162"/>
+            <a:off x="666750" y="2140446"/>
             <a:ext cx="12786360" cy="104775"/>
           </a:xfrm>
           <a:prstGeom prst="rect">
@@ -3395,8 +3395,8 @@
         </p:nvSpPr>
         <p:spPr>
           <a:xfrm>
-            <a:off x="666750" y="2319338"/>
-            <a:ext cx="12786360" cy="752475"/>
+            <a:off x="666750" y="2397621"/>
+            <a:ext cx="12786360" cy="595759"/>
           </a:xfrm>
           <a:prstGeom prst="rect">
             <a:avLst/>
@@ -3407,7 +3407,11 @@
           <a:bodyPr wrap="none" anchor="t" lIns="0" rIns="0" tIns="0" bIns="0"/>
           <a:lstStyle/>
           <a:p>
-            <a:pPr algn="l"/>
+            <a:pPr algn="l">
+              <a:lnSpc>
+                <a:spcPct val="92000"/>
+              </a:lnSpc>
+            </a:pPr>
             <a:r>
               <a:rPr sz="5100" i="1" b="0">
                 <a:solidFill>
@@ -3430,7 +3434,7 @@
         </p:nvSpPr>
         <p:spPr>
           <a:xfrm>
-            <a:off x="666750" y="3509962"/>
+            <a:off x="666750" y="3431530"/>
             <a:ext cx="7207568" cy="133350"/>
           </a:xfrm>
           <a:prstGeom prst="rect">
